--- a/internal/pptx/testdata/demo.pptx
+++ b/internal/pptx/testdata/demo.pptx
@@ -3840,7 +3840,7 @@
           <a:lstStyle/>
           <a:p>
             <a:r>
-              <a:t>Welcome to SlideCue</a:t>
+              <a:t>Welcome to DeckTap</a:t>
             </a:r>
           </a:p>
         </p:txBody>
